--- a/output/week11/Week11_Presentation_BICT3202_OOAD.pptx
+++ b/output/week11/Week11_Presentation_BICT3202_OOAD.pptx
@@ -7781,7 +7781,7 @@
                 </a:solidFill>
                 <a:latin typeface="Open Sans"/>
               </a:rPr>
-              <a:t>NotificationService behind a Notification interface → Email, SMS, WhatsApp.</a:t>
+              <a:t>NotificationService behind a Notification interface -&gt; Email, SMS, WhatsApp.</a:t>
             </a:r>
           </a:p>
           <a:p>
@@ -10101,7 +10101,7 @@
                 </a:solidFill>
                 <a:latin typeface="Open Sans"/>
               </a:rPr>
-              <a:t>Use case → classes → class design → service → sequence → state → architecture.</a:t>
+              <a:t>Use case -&gt; classes -&gt; class design -&gt; service -&gt; sequence -&gt; state -&gt; architecture.</a:t>
             </a:r>
           </a:p>
         </p:txBody>
@@ -11793,7 +11793,7 @@
                 </a:solidFill>
                 <a:latin typeface="Poppins"/>
               </a:rPr>
-              <a:t>Week 10 → 11 → 12</a:t>
+              <a:t>Week 10 -&gt; 11 -&gt; 12</a:t>
             </a:r>
           </a:p>
         </p:txBody>
@@ -11832,7 +11832,7 @@
                 </a:solidFill>
                 <a:latin typeface="Open Sans"/>
               </a:rPr>
-              <a:t>What is design? → refine it → integrate it</a:t>
+              <a:t>What is design? -&gt; refine it -&gt; integrate it</a:t>
             </a:r>
           </a:p>
         </p:txBody>
@@ -12253,7 +12253,7 @@
                 </a:solidFill>
                 <a:latin typeface="Open Sans"/>
               </a:rPr>
-              <a:t>General → detailed and precise</a:t>
+              <a:t>General -&gt; detailed and precise</a:t>
             </a:r>
           </a:p>
         </p:txBody>
@@ -13280,7 +13280,7 @@
                 </a:solidFill>
                 <a:latin typeface="Open Sans"/>
               </a:rPr>
-              <a:t>Student → RegistrationPage → RegistrationController → Registration → Course.</a:t>
+              <a:t>Student -&gt; RegistrationPage -&gt; RegistrationController -&gt; Registration -&gt; Course.</a:t>
             </a:r>
           </a:p>
         </p:txBody>
